--- a/docs/Презентация_Спортивный_клуб.pptx
+++ b/docs/Презентация_Спортивный_клуб.pptx
@@ -3433,7 +3433,7 @@
         <p:spPr>
           <a:xfrm>
             <a:off x="365760" y="1280160"/>
-            <a:ext cx="5669280" cy="3916957"/>
+            <a:ext cx="5669280" cy="3454717"/>
           </a:xfrm>
           <a:prstGeom prst="rect">
             <a:avLst/>
@@ -3457,7 +3457,7 @@
         <p:spPr>
           <a:xfrm>
             <a:off x="6217920" y="1280160"/>
-            <a:ext cx="5669280" cy="3916957"/>
+            <a:ext cx="5669280" cy="3454717"/>
           </a:xfrm>
           <a:prstGeom prst="rect">
             <a:avLst/>
@@ -3659,7 +3659,7 @@
         <p:spPr>
           <a:xfrm>
             <a:off x="365760" y="1280160"/>
-            <a:ext cx="5669280" cy="3916957"/>
+            <a:ext cx="5669280" cy="3454717"/>
           </a:xfrm>
           <a:prstGeom prst="rect">
             <a:avLst/>
@@ -3683,7 +3683,7 @@
         <p:spPr>
           <a:xfrm>
             <a:off x="6217920" y="1280160"/>
-            <a:ext cx="5669280" cy="3916957"/>
+            <a:ext cx="5669280" cy="3454717"/>
           </a:xfrm>
           <a:prstGeom prst="rect">
             <a:avLst/>
@@ -3945,7 +3945,7 @@
                 </a:solidFill>
                 <a:latin typeface="Calibri"/>
               </a:rPr>
-              <a:t>53</a:t>
+              <a:t>58</a:t>
             </a:r>
           </a:p>
         </p:txBody>
@@ -4066,7 +4066,7 @@
                 </a:solidFill>
                 <a:latin typeface="Calibri"/>
               </a:rPr>
-              <a:t>87 %</a:t>
+              <a:t>97 %</a:t>
             </a:r>
           </a:p>
         </p:txBody>
@@ -4105,7 +4105,7 @@
                 </a:solidFill>
                 <a:latin typeface="Calibri"/>
               </a:rPr>
-              <a:t>покрытие кода (≈97 % без seed_demo)</a:t>
+              <a:t>покрытие кода тестами</a:t>
             </a:r>
           </a:p>
         </p:txBody>
@@ -4518,7 +4518,7 @@
                 </a:solidFill>
                 <a:latin typeface="Courier New"/>
               </a:rPr>
-              <a:t>push / pull request  →  test (Python 3.12 и 3.13)</a:t>
+              <a:t>push / pull request  →  test (Py 3.9/Dj 4.2, Py 3.12–3.13/Dj 5.2)</a:t>
             </a:r>
           </a:p>
           <a:p>
@@ -5644,7 +5644,7 @@
                 </a:solidFill>
                 <a:latin typeface="Calibri"/>
               </a:rPr>
-              <a:t>•  Python 3.12+, Django 5.2 LTS, SQLite (триггеры, CHECK, UNIQUE)</a:t>
+              <a:t>•  Python 3.9+, Django 4.2 LTS / 5.2, SQLite (триггеры, CHECK, UNIQUE)</a:t>
             </a:r>
           </a:p>
           <a:p>
@@ -6774,7 +6774,7 @@
         <p:spPr>
           <a:xfrm>
             <a:off x="365760" y="1280160"/>
-            <a:ext cx="3657600" cy="2527069"/>
+            <a:ext cx="3657600" cy="2228850"/>
           </a:xfrm>
           <a:prstGeom prst="rect">
             <a:avLst/>
@@ -6798,7 +6798,7 @@
         <p:spPr>
           <a:xfrm>
             <a:off x="4114800" y="1280160"/>
-            <a:ext cx="3931920" cy="2716599"/>
+            <a:ext cx="3931920" cy="2396013"/>
           </a:xfrm>
           <a:prstGeom prst="rect">
             <a:avLst/>
@@ -6822,7 +6822,7 @@
         <p:spPr>
           <a:xfrm>
             <a:off x="8138160" y="1280160"/>
-            <a:ext cx="3657600" cy="2527069"/>
+            <a:ext cx="3657600" cy="2228850"/>
           </a:xfrm>
           <a:prstGeom prst="rect">
             <a:avLst/>
@@ -7024,7 +7024,7 @@
         <p:spPr>
           <a:xfrm>
             <a:off x="365760" y="1280160"/>
-            <a:ext cx="5669280" cy="3916957"/>
+            <a:ext cx="5669280" cy="3454717"/>
           </a:xfrm>
           <a:prstGeom prst="rect">
             <a:avLst/>
@@ -7048,7 +7048,7 @@
         <p:spPr>
           <a:xfrm>
             <a:off x="6217920" y="1280160"/>
-            <a:ext cx="5669280" cy="3916957"/>
+            <a:ext cx="5669280" cy="3454717"/>
           </a:xfrm>
           <a:prstGeom prst="rect">
             <a:avLst/>

--- a/docs/Презентация_Спортивный_клуб.pptx
+++ b/docs/Презентация_Спортивный_клуб.pptx
@@ -6440,7 +6440,7 @@
                 </a:solidFill>
                 <a:latin typeface="KyivType Sans Medium" panose="00000600000000000000" pitchFamily="50" charset="-52"/>
               </a:rPr>
-              <a:t>3 курса группы </a:t>
+              <a:t>3 курса группы  о-П </a:t>
             </a:r>
             <a:r>
               <a:rPr lang="ru-RU" sz="1600" dirty="0">
@@ -6449,7 +6449,7 @@
                 </a:solidFill>
                 <a:latin typeface="KyivType Sans Medium" panose="00000600000000000000" pitchFamily="50" charset="-52"/>
               </a:rPr>
-              <a:t>[номер группы]</a:t>
+              <a:t>1125</a:t>
             </a:r>
           </a:p>
           <a:p>
@@ -6476,7 +6476,7 @@
                 </a:solidFill>
                 <a:latin typeface="KyivType Sans Medium" panose="00000600000000000000" pitchFamily="50" charset="-52"/>
               </a:rPr>
-              <a:t>Узалова Гамида [отчество в родительном падеже]</a:t>
+              <a:t>Узалова Гамида Иманалиевича</a:t>
             </a:r>
           </a:p>
         </p:txBody>
@@ -6565,7 +6565,7 @@
                 </a:solidFill>
                 <a:latin typeface="KyivType Sans Medium" panose="00000600000000000000" pitchFamily="50" charset="-52"/>
               </a:rPr>
-              <a:t>преподаватель: Нагапетян </a:t>
+              <a:t>преподаватель: Евдошенко Наиля Ильнуровна</a:t>
             </a:r>
             <a:r>
               <a:rPr lang="ru-RU" sz="1600" dirty="0" err="1">
@@ -6574,7 +6574,7 @@
                 </a:solidFill>
                 <a:latin typeface="KyivType Sans Medium" panose="00000600000000000000" pitchFamily="50" charset="-52"/>
               </a:rPr>
-              <a:t>Паргев</a:t>
+              <a:t/>
             </a:r>
             <a:r>
               <a:rPr lang="ru-RU" sz="1600" dirty="0">
@@ -6583,7 +6583,7 @@
                 </a:solidFill>
                 <a:latin typeface="KyivType Sans Medium" panose="00000600000000000000" pitchFamily="50" charset="-52"/>
               </a:rPr>
-              <a:t> </a:t>
+              <a:t/>
             </a:r>
             <a:r>
               <a:rPr lang="ru-RU" sz="1600" dirty="0" err="1">
@@ -6592,7 +6592,7 @@
                 </a:solidFill>
                 <a:latin typeface="KyivType Sans Medium" panose="00000600000000000000" pitchFamily="50" charset="-52"/>
               </a:rPr>
-              <a:t>Смбатович</a:t>
+              <a:t/>
             </a:r>
             <a:endParaRPr lang="ru-RU" sz="1600" dirty="0">
               <a:solidFill>

--- a/docs/Презентация_Спортивный_клуб.pptx
+++ b/docs/Презентация_Спортивный_клуб.pptx
@@ -5819,7 +5819,7 @@
             <a:r>
               <a:rPr lang="ru-RU" sz="2400" dirty="0">
                 <a:solidFill>
-                  <a:schemeClr val="bg1"/>
+                  <a:srgbClr val="FFFFFF"/>
                 </a:solidFill>
                 <a:latin typeface="KyivType Sans Heavy" panose="00000900000000000000" pitchFamily="50" charset="-52"/>
               </a:rPr>
@@ -5831,7 +5831,7 @@
             <a:r>
               <a:rPr lang="ru-RU" sz="2400" dirty="0">
                 <a:solidFill>
-                  <a:schemeClr val="bg1"/>
+                  <a:srgbClr val="FFFFFF"/>
                 </a:solidFill>
                 <a:latin typeface="KyivType Sans Heavy" panose="00000900000000000000" pitchFamily="50" charset="-52"/>
               </a:rPr>
@@ -6313,7 +6313,7 @@
             <a:r>
               <a:rPr lang="ru-RU" sz="1600" dirty="0">
                 <a:solidFill>
-                  <a:schemeClr val="bg1"/>
+                  <a:srgbClr val="FFFFFF"/>
                 </a:solidFill>
                 <a:latin typeface="KyivType Sans Medium" panose="00000600000000000000" pitchFamily="50" charset="-52"/>
               </a:rPr>
@@ -6340,7 +6340,7 @@
             <a:r>
               <a:rPr lang="ru-RU" sz="1600" dirty="0">
                 <a:solidFill>
-                  <a:schemeClr val="bg1"/>
+                  <a:srgbClr val="FFFFFF"/>
                 </a:solidFill>
                 <a:latin typeface="KyivType Sans Medium" panose="00000600000000000000" pitchFamily="50" charset="-52"/>
               </a:rPr>
@@ -6349,7 +6349,7 @@
             <a:r>
               <a:rPr lang="ru-RU" sz="1600" dirty="0">
                 <a:solidFill>
-                  <a:srgbClr val="FFFF00"/>
+                  <a:srgbClr val="FFFFFF"/>
                 </a:solidFill>
                 <a:latin typeface="KyivType Sans Medium" panose="00000600000000000000" pitchFamily="50" charset="-52"/>
               </a:rPr>
@@ -6382,7 +6382,7 @@
             <a:r>
               <a:rPr lang="ru-RU" sz="1600" dirty="0">
                 <a:solidFill>
-                  <a:schemeClr val="bg1"/>
+                  <a:srgbClr val="FFFFFF"/>
                 </a:solidFill>
                 <a:latin typeface="KyivType Sans Medium" panose="00000600000000000000" pitchFamily="50" charset="-52"/>
               </a:rPr>
@@ -6409,7 +6409,7 @@
             <a:r>
               <a:rPr lang="ru-RU" sz="1600" dirty="0">
                 <a:solidFill>
-                  <a:schemeClr val="bg1"/>
+                  <a:srgbClr val="FFFFFF"/>
                 </a:solidFill>
                 <a:latin typeface="KyivType Sans Medium" panose="00000600000000000000" pitchFamily="50" charset="-52"/>
               </a:rPr>
@@ -6436,7 +6436,7 @@
             <a:r>
               <a:rPr lang="ru-RU" sz="1600" dirty="0">
                 <a:solidFill>
-                  <a:schemeClr val="bg1"/>
+                  <a:srgbClr val="FFFFFF"/>
                 </a:solidFill>
                 <a:latin typeface="KyivType Sans Medium" panose="00000600000000000000" pitchFamily="50" charset="-52"/>
               </a:rPr>
@@ -6445,7 +6445,7 @@
             <a:r>
               <a:rPr lang="ru-RU" sz="1600" dirty="0">
                 <a:solidFill>
-                  <a:srgbClr val="FF0000"/>
+                  <a:srgbClr val="FFFFFF"/>
                 </a:solidFill>
                 <a:latin typeface="KyivType Sans Medium" panose="00000600000000000000" pitchFamily="50" charset="-52"/>
               </a:rPr>
@@ -6472,7 +6472,7 @@
             <a:r>
               <a:rPr lang="ru-RU" sz="1600" dirty="0">
                 <a:solidFill>
-                  <a:srgbClr val="FF0000"/>
+                  <a:srgbClr val="FFFFFF"/>
                 </a:solidFill>
                 <a:latin typeface="KyivType Sans Medium" panose="00000600000000000000" pitchFamily="50" charset="-52"/>
               </a:rPr>

--- a/docs/Презентация_Спортивный_клуб.pptx
+++ b/docs/Презентация_Спортивный_клуб.pptx
@@ -23,11 +23,11 @@
     <p:sldId id="338" r:id="rId10"/>
     <p:sldId id="344" r:id="rId26"/>
     <p:sldId id="345" r:id="rId27"/>
+    <p:sldId id="348" r:id="rId30"/>
     <p:sldId id="335" r:id="rId11"/>
     <p:sldId id="346" r:id="rId28"/>
     <p:sldId id="339" r:id="rId12"/>
     <p:sldId id="347" r:id="rId29"/>
-    <p:sldId id="348" r:id="rId30"/>
     <p:sldId id="334" r:id="rId13"/>
     <p:sldId id="329" r:id="rId14"/>
   </p:sldIdLst>
@@ -1186,7 +1186,7 @@
           <a:lstStyle/>
           <a:p>
             <a:r>
-              <a:t>58 тестов на Python 3.9 с Django 4.2 и на Python 3.13 с Django 5.2: все проходят. Покрытие 97 %.</a:t>
+              <a:t>63 теста на Python 3.9 с Django 4.2 и на Python 3.13 с Django 5.2: все проходят. Покрытие 98 %.</a:t>
             </a:r>
           </a:p>
         </p:txBody>
@@ -1326,7 +1326,7 @@
           <a:lstStyle/>
           <a:p>
             <a:r>
-              <a:t>История разработки — серия небольших коммитов с понятными сообщениями.</a:t>
+              <a:t>Расписание недели и главная страница с диаграммами.</a:t>
             </a:r>
           </a:p>
         </p:txBody>
@@ -7013,8 +7013,8 @@
         </p:blipFill>
         <p:spPr>
           <a:xfrm>
-            <a:off x="731520" y="1321593"/>
-            <a:ext cx="6766560" cy="4123372"/>
+            <a:off x="731520" y="1268730"/>
+            <a:ext cx="6766560" cy="4229100"/>
           </a:xfrm>
           <a:prstGeom prst="rect">
             <a:avLst/>
@@ -7440,7 +7440,7 @@
                   <a:srgbClr val="5B4BE8"/>
                 </a:solidFill>
               </a:rPr>
-              <a:t>58</a:t>
+              <a:t>63</a:t>
             </a:r>
           </a:p>
         </p:txBody>
@@ -7478,7 +7478,7 @@
                   <a:srgbClr val="111111"/>
                 </a:solidFill>
               </a:rPr>
-              <a:t>автоматических тестов</a:t>
+              <a:t>автоматических теста</a:t>
             </a:r>
           </a:p>
         </p:txBody>
@@ -7562,7 +7562,7 @@
                   <a:srgbClr val="5B4BE8"/>
                 </a:solidFill>
               </a:rPr>
-              <a:t>97 %</a:t>
+              <a:t>98 %</a:t>
             </a:r>
           </a:p>
         </p:txBody>
@@ -8718,7 +8718,7 @@
               <a:rPr lang="ru-RU" sz="1800" dirty="0">
                 <a:latin typeface="KyivType Sans Medium" panose="00000600000000000000" pitchFamily="50" charset="-52"/>
               </a:rPr>
-              <a:t>Правила клуба (лимит 10, 60 минут, скидка 3–10 %) защищены на уровне БД и проверены 58 тестами</a:t>
+              <a:t>Правила клуба (лимит 10, 60 минут, скидка 3–10 %) защищены на уровне БД и проверены 63 тестами</a:t>
             </a:r>
           </a:p>
           <a:p>
@@ -13166,8 +13166,8 @@
         </p:blipFill>
         <p:spPr>
           <a:xfrm>
-            <a:off x="640080" y="1693783"/>
-            <a:ext cx="5394960" cy="3287553"/>
+            <a:off x="640080" y="1651635"/>
+            <a:ext cx="5394960" cy="3371850"/>
           </a:xfrm>
           <a:prstGeom prst="rect">
             <a:avLst/>
@@ -13190,8 +13190,8 @@
         </p:blipFill>
         <p:spPr>
           <a:xfrm>
-            <a:off x="6217920" y="1665922"/>
-            <a:ext cx="5486400" cy="3343275"/>
+            <a:off x="6217920" y="1623060"/>
+            <a:ext cx="5486400" cy="3429000"/>
           </a:xfrm>
           <a:prstGeom prst="rect">
             <a:avLst/>
@@ -13483,8 +13483,8 @@
         </p:blipFill>
         <p:spPr>
           <a:xfrm>
-            <a:off x="640080" y="1693783"/>
-            <a:ext cx="5394960" cy="3287553"/>
+            <a:off x="640080" y="1651635"/>
+            <a:ext cx="5394960" cy="3371850"/>
           </a:xfrm>
           <a:prstGeom prst="rect">
             <a:avLst/>
@@ -13507,8 +13507,8 @@
         </p:blipFill>
         <p:spPr>
           <a:xfrm>
-            <a:off x="6217920" y="1665922"/>
-            <a:ext cx="5486400" cy="3343275"/>
+            <a:off x="6217920" y="1623060"/>
+            <a:ext cx="5486400" cy="3429000"/>
           </a:xfrm>
           <a:prstGeom prst="rect">
             <a:avLst/>
@@ -14339,8 +14339,8 @@
         </p:blipFill>
         <p:spPr>
           <a:xfrm>
-            <a:off x="640080" y="1556623"/>
-            <a:ext cx="5394960" cy="3287553"/>
+            <a:off x="640080" y="1514475"/>
+            <a:ext cx="5394960" cy="3371850"/>
           </a:xfrm>
           <a:prstGeom prst="rect">
             <a:avLst/>
@@ -14363,8 +14363,8 @@
         </p:blipFill>
         <p:spPr>
           <a:xfrm>
-            <a:off x="6217920" y="1528762"/>
-            <a:ext cx="5486400" cy="3343275"/>
+            <a:off x="6217920" y="1485900"/>
+            <a:ext cx="5486400" cy="3429000"/>
           </a:xfrm>
           <a:prstGeom prst="rect">
             <a:avLst/>
@@ -15300,7 +15300,7 @@
               <a:rPr lang="ru-RU" sz="2800" dirty="0">
                 <a:latin typeface="KyivType Sans Heavy" panose="00000900000000000000" pitchFamily="50" charset="-52"/>
               </a:rPr>
-              <a:t>ОРГАНИЗАЦИЯ РАЗРАБОТКИ</a:t>
+              <a:t>РАСПИСАНИЕ НЕДЕЛИ И ГЛАВНАЯ СТРАНИЦА</a:t>
             </a:r>
           </a:p>
         </p:txBody>
@@ -15481,256 +15481,64 @@
           </p:style>
         </p:cxnSp>
       </p:grpSp>
-      <p:grpSp>
-        <p:nvGrpSpPr>
-          <p:cNvPr id="3" name="Группа 32">
-            <a:extLst>
-              <a:ext uri="{FF2B5EF4-FFF2-40B4-BE49-F238E27FC236}">
-                <a16:creationId xmlns:a16="http://schemas.microsoft.com/office/drawing/2014/main" id="{54883227-2BCB-4605-89FE-C937969443AF}"/>
-              </a:ext>
-            </a:extLst>
-          </p:cNvPr>
-          <p:cNvGrpSpPr/>
+      <p:pic>
+        <p:nvPicPr>
+          <p:cNvPr id="30" name="Picture 29" descr="timetable.png"/>
+          <p:cNvPicPr>
+            <a:picLocks noChangeAspect="1"/>
+          </p:cNvPicPr>
           <p:nvPr/>
-        </p:nvGrpSpPr>
-        <p:grpSpPr>
-          <a:xfrm rot="5400000">
-            <a:off x="9532229" y="1579061"/>
-            <a:ext cx="1782138" cy="1301154"/>
-            <a:chOff x="9404916" y="1524706"/>
-            <a:chExt cx="1568126" cy="1144902"/>
+        </p:nvPicPr>
+        <p:blipFill>
+          <a:blip r:embed="rId3"/>
+          <a:stretch>
+            <a:fillRect/>
+          </a:stretch>
+        </p:blipFill>
+        <p:spPr>
+          <a:xfrm>
+            <a:off x="640080" y="1651635"/>
+            <a:ext cx="5394960" cy="3371850"/>
           </a:xfrm>
-        </p:grpSpPr>
-        <p:sp>
-          <p:nvSpPr>
-            <p:cNvPr id="34" name="Прямоугольник: усеченные противолежащие углы 33">
-              <a:extLst>
-                <a:ext uri="{FF2B5EF4-FFF2-40B4-BE49-F238E27FC236}">
-                  <a16:creationId xmlns:a16="http://schemas.microsoft.com/office/drawing/2014/main" id="{CE0044F3-F10A-4983-AC15-ADD21B3CEDEC}"/>
-                </a:ext>
-              </a:extLst>
-            </p:cNvPr>
-            <p:cNvSpPr/>
-            <p:nvPr/>
-          </p:nvSpPr>
-          <p:spPr>
-            <a:xfrm flipH="1">
-              <a:off x="9724547" y="1524706"/>
-              <a:ext cx="1248495" cy="479958"/>
-            </a:xfrm>
-            <a:prstGeom prst="snip2DiagRect">
-              <a:avLst>
-                <a:gd name="adj1" fmla="val 0"/>
-                <a:gd name="adj2" fmla="val 50000"/>
-              </a:avLst>
-            </a:prstGeom>
-            <a:noFill/>
-            <a:ln w="28575">
-              <a:solidFill>
-                <a:srgbClr val="293DF4"/>
-              </a:solidFill>
-            </a:ln>
-          </p:spPr>
-          <p:style>
-            <a:lnRef idx="2">
-              <a:schemeClr val="accent1">
-                <a:shade val="50000"/>
-              </a:schemeClr>
-            </a:lnRef>
-            <a:fillRef idx="1">
-              <a:schemeClr val="accent1"/>
-            </a:fillRef>
-            <a:effectRef idx="0">
-              <a:schemeClr val="accent1"/>
-            </a:effectRef>
-            <a:fontRef idx="minor">
-              <a:schemeClr val="lt1"/>
-            </a:fontRef>
-          </p:style>
-          <p:txBody>
-            <a:bodyPr rtlCol="0" anchor="ctr"/>
-            <a:lstStyle/>
-            <a:p>
-              <a:pPr algn="ctr"/>
-              <a:endParaRPr lang="ru-RU">
-                <a:noFill/>
-              </a:endParaRPr>
-            </a:p>
-          </p:txBody>
-        </p:sp>
-        <p:sp>
-          <p:nvSpPr>
-            <p:cNvPr id="35" name="Овал 34">
-              <a:extLst>
-                <a:ext uri="{FF2B5EF4-FFF2-40B4-BE49-F238E27FC236}">
-                  <a16:creationId xmlns:a16="http://schemas.microsoft.com/office/drawing/2014/main" id="{407E6762-F69C-4E1E-80EA-9F7759F60626}"/>
-                </a:ext>
-              </a:extLst>
-            </p:cNvPr>
-            <p:cNvSpPr/>
-            <p:nvPr/>
-          </p:nvSpPr>
-          <p:spPr>
-            <a:xfrm>
-              <a:off x="9404916" y="1764685"/>
-              <a:ext cx="239979" cy="239979"/>
-            </a:xfrm>
-            <a:prstGeom prst="ellipse">
-              <a:avLst/>
-            </a:prstGeom>
-            <a:noFill/>
-            <a:ln w="28575">
-              <a:solidFill>
-                <a:srgbClr val="FF00FF"/>
-              </a:solidFill>
-            </a:ln>
-          </p:spPr>
-          <p:style>
-            <a:lnRef idx="2">
-              <a:schemeClr val="accent1">
-                <a:shade val="50000"/>
-              </a:schemeClr>
-            </a:lnRef>
-            <a:fillRef idx="1">
-              <a:schemeClr val="accent1"/>
-            </a:fillRef>
-            <a:effectRef idx="0">
-              <a:schemeClr val="accent1"/>
-            </a:effectRef>
-            <a:fontRef idx="minor">
-              <a:schemeClr val="lt1"/>
-            </a:fontRef>
-          </p:style>
-          <p:txBody>
-            <a:bodyPr rtlCol="0" anchor="ctr"/>
-            <a:lstStyle/>
-            <a:p>
-              <a:pPr algn="ctr"/>
-              <a:endParaRPr lang="ru-RU">
-                <a:noFill/>
-              </a:endParaRPr>
-            </a:p>
-          </p:txBody>
-        </p:sp>
-        <p:sp>
-          <p:nvSpPr>
-            <p:cNvPr id="42" name="Прямоугольник 41">
-              <a:extLst>
-                <a:ext uri="{FF2B5EF4-FFF2-40B4-BE49-F238E27FC236}">
-                  <a16:creationId xmlns:a16="http://schemas.microsoft.com/office/drawing/2014/main" id="{FFCCEAF9-B57A-4791-B4D8-88A22764EB62}"/>
-                </a:ext>
-              </a:extLst>
-            </p:cNvPr>
-            <p:cNvSpPr/>
-            <p:nvPr/>
-          </p:nvSpPr>
-          <p:spPr>
-            <a:xfrm>
-              <a:off x="9724546" y="2079482"/>
-              <a:ext cx="257654" cy="257654"/>
-            </a:xfrm>
-            <a:prstGeom prst="rect">
-              <a:avLst/>
-            </a:prstGeom>
-            <a:noFill/>
-            <a:ln w="28575">
-              <a:solidFill>
-                <a:srgbClr val="00FE5D"/>
-              </a:solidFill>
-            </a:ln>
-          </p:spPr>
-          <p:style>
-            <a:lnRef idx="2">
-              <a:schemeClr val="accent1">
-                <a:shade val="50000"/>
-              </a:schemeClr>
-            </a:lnRef>
-            <a:fillRef idx="1">
-              <a:schemeClr val="accent1"/>
-            </a:fillRef>
-            <a:effectRef idx="0">
-              <a:schemeClr val="accent1"/>
-            </a:effectRef>
-            <a:fontRef idx="minor">
-              <a:schemeClr val="lt1"/>
-            </a:fontRef>
-          </p:style>
-          <p:txBody>
-            <a:bodyPr rtlCol="0" anchor="ctr"/>
-            <a:lstStyle/>
-            <a:p>
-              <a:pPr algn="ctr"/>
-              <a:endParaRPr lang="ru-RU">
-                <a:noFill/>
-              </a:endParaRPr>
-            </a:p>
-          </p:txBody>
-        </p:sp>
-        <p:sp>
-          <p:nvSpPr>
-            <p:cNvPr id="43" name="Прямоугольник 42">
-              <a:extLst>
-                <a:ext uri="{FF2B5EF4-FFF2-40B4-BE49-F238E27FC236}">
-                  <a16:creationId xmlns:a16="http://schemas.microsoft.com/office/drawing/2014/main" id="{3E7D705F-6ECA-4104-94D5-9F737A21D95F}"/>
-                </a:ext>
-              </a:extLst>
-            </p:cNvPr>
-            <p:cNvSpPr/>
-            <p:nvPr/>
-          </p:nvSpPr>
-          <p:spPr>
-            <a:xfrm>
-              <a:off x="9724546" y="2411954"/>
-              <a:ext cx="257654" cy="257654"/>
-            </a:xfrm>
-            <a:prstGeom prst="rect">
-              <a:avLst/>
-            </a:prstGeom>
-            <a:noFill/>
-            <a:ln w="28575">
-              <a:solidFill>
-                <a:srgbClr val="00FE5D"/>
-              </a:solidFill>
-            </a:ln>
-          </p:spPr>
-          <p:style>
-            <a:lnRef idx="2">
-              <a:schemeClr val="accent1">
-                <a:shade val="50000"/>
-              </a:schemeClr>
-            </a:lnRef>
-            <a:fillRef idx="1">
-              <a:schemeClr val="accent1"/>
-            </a:fillRef>
-            <a:effectRef idx="0">
-              <a:schemeClr val="accent1"/>
-            </a:effectRef>
-            <a:fontRef idx="minor">
-              <a:schemeClr val="lt1"/>
-            </a:fontRef>
-          </p:style>
-          <p:txBody>
-            <a:bodyPr rtlCol="0" anchor="ctr"/>
-            <a:lstStyle/>
-            <a:p>
-              <a:pPr algn="ctr"/>
-              <a:endParaRPr lang="ru-RU">
-                <a:noFill/>
-              </a:endParaRPr>
-            </a:p>
-          </p:txBody>
-        </p:sp>
-      </p:grpSp>
-      <p:sp>
-        <p:nvSpPr>
-          <p:cNvPr id="44" name="TextBox 43"/>
+          <a:prstGeom prst="rect">
+            <a:avLst/>
+          </a:prstGeom>
+        </p:spPr>
+      </p:pic>
+      <p:pic>
+        <p:nvPicPr>
+          <p:cNvPr id="31" name="Picture 30" descr="home_operator.png"/>
+          <p:cNvPicPr>
+            <a:picLocks noChangeAspect="1"/>
+          </p:cNvPicPr>
+          <p:nvPr/>
+        </p:nvPicPr>
+        <p:blipFill>
+          <a:blip r:embed="rId4"/>
+          <a:stretch>
+            <a:fillRect/>
+          </a:stretch>
+        </p:blipFill>
+        <p:spPr>
+          <a:xfrm>
+            <a:off x="6217920" y="1588770"/>
+            <a:ext cx="5486400" cy="3497579"/>
+          </a:xfrm>
+          <a:prstGeom prst="rect">
+            <a:avLst/>
+          </a:prstGeom>
+        </p:spPr>
+      </p:pic>
+      <p:sp>
+        <p:nvSpPr>
+          <p:cNvPr id="32" name="TextBox 31"/>
           <p:cNvSpPr txBox="1"/>
           <p:nvPr/>
         </p:nvSpPr>
         <p:spPr>
           <a:xfrm>
-            <a:off x="822960" y="1280160"/>
-            <a:ext cx="8503920" cy="4754880"/>
+            <a:off x="640080" y="5623560"/>
+            <a:ext cx="10972800" cy="548640"/>
           </a:xfrm>
           <a:prstGeom prst="rect">
             <a:avLst/>
@@ -15743,103 +15551,18 @@
           </a:bodyPr>
           <a:lstStyle/>
           <a:p>
-            <a:pPr algn="l" marL="285750" indent="-285750">
+            <a:pPr algn="ctr">
               <a:spcAft>
-                <a:spcPts val="1200"/>
+                <a:spcPts val="600"/>
               </a:spcAft>
-              <a:buClr>
-                <a:srgbClr val="5B4BE8"/>
-              </a:buClr>
-              <a:buFont typeface="Arial"/>
-              <a:buChar char="•"/>
             </a:pPr>
             <a:r>
-              <a:rPr sz="1800" b="0">
+              <a:rPr sz="1400" b="0">
                 <a:solidFill>
-                  <a:srgbClr val="111111"/>
+                  <a:srgbClr val="6B7280"/>
                 </a:solidFill>
               </a:rPr>
-              <a:t>Репозиторий: github.com/Uzalov-Gamid/sport-club</a:t>
-            </a:r>
-          </a:p>
-          <a:p>
-            <a:pPr algn="l" marL="285750" indent="-285750">
-              <a:spcAft>
-                <a:spcPts val="1200"/>
-              </a:spcAft>
-              <a:buClr>
-                <a:srgbClr val="5B4BE8"/>
-              </a:buClr>
-              <a:buFont typeface="Arial"/>
-              <a:buChar char="•"/>
-            </a:pPr>
-            <a:r>
-              <a:rPr sz="1800" b="0">
-                <a:solidFill>
-                  <a:srgbClr val="111111"/>
-                </a:solidFill>
-              </a:rPr>
-              <a:t>70+ небольших коммитов: модели, миграции, триггеры, сервисы, формы, интерфейс, тесты, CI</a:t>
-            </a:r>
-          </a:p>
-          <a:p>
-            <a:pPr algn="l" marL="285750" indent="-285750">
-              <a:spcAft>
-                <a:spcPts val="1200"/>
-              </a:spcAft>
-              <a:buClr>
-                <a:srgbClr val="5B4BE8"/>
-              </a:buClr>
-              <a:buFont typeface="Arial"/>
-              <a:buChar char="•"/>
-            </a:pPr>
-            <a:r>
-              <a:rPr sz="1800" b="0">
-                <a:solidFill>
-                  <a:srgbClr val="111111"/>
-                </a:solidFill>
-              </a:rPr>
-              <a:t>Сообщения по соглашению feat / fix / test / docs / ci</a:t>
-            </a:r>
-          </a:p>
-          <a:p>
-            <a:pPr algn="l" marL="285750" indent="-285750">
-              <a:spcAft>
-                <a:spcPts val="1200"/>
-              </a:spcAft>
-              <a:buClr>
-                <a:srgbClr val="5B4BE8"/>
-              </a:buClr>
-              <a:buFont typeface="Arial"/>
-              <a:buChar char="•"/>
-            </a:pPr>
-            <a:r>
-              <a:rPr sz="1800" b="0">
-                <a:solidFill>
-                  <a:srgbClr val="111111"/>
-                </a:solidFill>
-              </a:rPr>
-              <a:t>README с инструкцией: migrate → seed_demo → runserver</a:t>
-            </a:r>
-          </a:p>
-          <a:p>
-            <a:pPr algn="l" marL="285750" indent="-285750">
-              <a:spcAft>
-                <a:spcPts val="1200"/>
-              </a:spcAft>
-              <a:buClr>
-                <a:srgbClr val="5B4BE8"/>
-              </a:buClr>
-              <a:buFont typeface="Arial"/>
-              <a:buChar char="•"/>
-            </a:pPr>
-            <a:r>
-              <a:rPr sz="1800" b="0">
-                <a:solidFill>
-                  <a:srgbClr val="111111"/>
-                </a:solidFill>
-              </a:rPr>
-              <a:t>Демо-данные и создание администратора одной командой seed_demo</a:t>
+              <a:t>Сетка занятий по дням недели с цветами секций; на главной — диаграммы заполненности групп и состава клиентов</a:t>
             </a:r>
           </a:p>
         </p:txBody>
@@ -17569,7 +17292,7 @@
                   <a:srgbClr val="111111"/>
                 </a:solidFill>
               </a:rPr>
-              <a:t>unittest + coverage: 58 тестов, 97 %</a:t>
+              <a:t>unittest + coverage: 63 теста, 98 %</a:t>
             </a:r>
           </a:p>
           <a:p>
@@ -18398,8 +18121,8 @@
         </p:blipFill>
         <p:spPr>
           <a:xfrm>
-            <a:off x="5212080" y="1341596"/>
-            <a:ext cx="6400800" cy="3900487"/>
+            <a:off x="5212080" y="1291590"/>
+            <a:ext cx="6400800" cy="4000500"/>
           </a:xfrm>
           <a:prstGeom prst="rect">
             <a:avLst/>
@@ -19996,8 +19719,8 @@
         </p:blipFill>
         <p:spPr>
           <a:xfrm>
-            <a:off x="640080" y="1739503"/>
-            <a:ext cx="5394960" cy="3287553"/>
+            <a:off x="640080" y="1697354"/>
+            <a:ext cx="5394960" cy="3371850"/>
           </a:xfrm>
           <a:prstGeom prst="rect">
             <a:avLst/>
@@ -20020,8 +19743,8 @@
         </p:blipFill>
         <p:spPr>
           <a:xfrm>
-            <a:off x="6217920" y="1711642"/>
-            <a:ext cx="5486400" cy="3343275"/>
+            <a:off x="6290491" y="1280160"/>
+            <a:ext cx="5341257" cy="4206240"/>
           </a:xfrm>
           <a:prstGeom prst="rect">
             <a:avLst/>

--- a/docs/Презентация_Спортивный_клуб.pptx
+++ b/docs/Презентация_Спортивный_клуб.pptx
@@ -8674,7 +8674,7 @@
               <a:rPr lang="ru-RU" sz="1800" dirty="0">
                 <a:latin typeface="KyivType Sans Medium" panose="00000600000000000000" pitchFamily="50" charset="-52"/>
               </a:rPr>
-              <a:t>Выводы по теме исследования:</a:t>
+              <a:t>Выводы:</a:t>
             </a:r>
           </a:p>
           <a:p>
